--- a/dist/초4/사회·역사/지역사와유산/초4_사회·역사_지역사와유산_01_지역의문화유산.pptx
+++ b/dist/초4/사회·역사/지역사와유산/초4_사회·역사_지역사와유산_01_지역의문화유산.pptx
@@ -121,13 +121,13 @@
   <p:extLst>
     <p:ext uri="{521415D9-36F7-43E2-AB2F-B90AF26B5E84}">
       <p14:sectionLst xmlns:p14="http://schemas.microsoft.com/office/powerpoint/2010/main">
-        <p14:section name="도입" id="{979ca1fa-8db4-875b-48c3-e23a0cc21555}">
+        <p14:section name="도입" id="{f3b30de4-cb46-a948-9e55-c4865048621a}">
           <p14:sldIdLst>
             <p14:sldId id="256"/>
             <p14:sldId id="257"/>
           </p14:sldIdLst>
         </p14:section>
-        <p14:section name="개념" id="{74da9c9b-7a82-fe37-0123-42fe4ba0a448}">
+        <p14:section name="개념" id="{143e7d50-19ae-de8a-1944-a2d4b6f4762d}">
           <p14:sldIdLst>
             <p14:sldId id="258"/>
             <p14:sldId id="259"/>
@@ -135,7 +135,7 @@
             <p14:sldId id="263"/>
           </p14:sldIdLst>
         </p14:section>
-        <p14:section name="연습" id="{2edea2ef-90b1-9998-7043-59ff14772b77}">
+        <p14:section name="연습" id="{f1fca658-448a-ebb6-322f-7ca95680fd27}">
           <p14:sldIdLst>
             <p14:sldId id="260"/>
             <p14:sldId id="261"/>
@@ -143,25 +143,25 @@
             <p14:sldId id="265"/>
           </p14:sldIdLst>
         </p14:section>
-        <p14:section name="개념" id="{8e62d424-6248-9e15-efc1-c953dc983038}">
+        <p14:section name="개념" id="{c272f37b-d70d-2e1f-f031-1ab7c4bf242c}">
           <p14:sldIdLst/>
         </p14:section>
-        <p14:section name="연습" id="{1cbc5c7a-c0c7-5a8a-109f-36b77d9398e3}">
+        <p14:section name="연습" id="{d160c7db-464d-4680-c513-5eee3da759e3}">
           <p14:sldIdLst/>
         </p14:section>
-        <p14:section name="확인" id="{60bbecd3-64c4-0cdb-e39c-8127f6942cbe}">
+        <p14:section name="확인" id="{20d54080-2e14-71ad-d313-c7a8eabdf1b3}">
           <p14:sldIdLst>
             <p14:sldId id="266"/>
             <p14:sldId id="267"/>
             <p14:sldId id="268"/>
           </p14:sldIdLst>
         </p14:section>
-        <p14:section name="정리" id="{177effeb-3e8c-1724-cfa9-b2e20a14aa45}">
+        <p14:section name="정리" id="{1560f7b4-4fec-1170-478e-3db432f3c71f}">
           <p14:sldIdLst>
             <p14:sldId id="269"/>
           </p14:sldIdLst>
         </p14:section>
-        <p14:section name="보충" id="{2e544353-0110-cf98-edcc-f9b0a80ffe13}">
+        <p14:section name="보충" id="{57270659-93bb-1915-f3c4-a696a0b1d93e}">
           <p14:sldIdLst>
             <p14:sldId id="270"/>
           </p14:sldIdLst>
